--- a/slidedecks/PPT - OCPF BC Agentic Dev Framework.pptx
+++ b/slidedecks/PPT - OCPF BC Agentic Dev Framework.pptx
@@ -2327,7 +2327,7 @@
                 <a:ea typeface="Archivo" pitchFamily="34" charset="-122"/>
                 <a:cs typeface="Archivo" pitchFamily="34" charset="-120"/>
               </a:rPr>
-              <a:t>Agentic Development Framework</a:t>
+              <a:t>Agentic Development Framework for D365 BC</a:t>
             </a:r>
             <a:endParaRPr lang="en-US" sz="10200" dirty="0"/>
           </a:p>
@@ -2398,7 +2398,48 @@
                 <a:ea typeface="Archivo" pitchFamily="34" charset="-122"/>
                 <a:cs typeface="Archivo" pitchFamily="34" charset="-120"/>
               </a:rPr>
-              <a:t>Simple Enough for Functional Consultants. Robust Enough for Pro Developers.</a:t>
+              <a:t>Simple Enough for Functional Consultants</a:t>
+            </a:r>
+            <a:r>
+              <a:rPr lang="en-US" sz="3150" b="1">
+                <a:solidFill>
+                  <a:srgbClr val="201E1D"/>
+                </a:solidFill>
+                <a:latin typeface="Archivo" pitchFamily="34" charset="0"/>
+                <a:ea typeface="Archivo" pitchFamily="34" charset="-122"/>
+                <a:cs typeface="Archivo" pitchFamily="34" charset="-120"/>
+              </a:rPr>
+              <a:t>. </a:t>
+            </a:r>
+          </a:p>
+          <a:p>
+            <a:pPr marL="0" indent="0" algn="l">
+              <a:lnSpc>
+                <a:spcPct val="114130"/>
+              </a:lnSpc>
+              <a:buNone/>
+            </a:pPr>
+            <a:r>
+              <a:rPr lang="en-US" sz="3150" b="1">
+                <a:solidFill>
+                  <a:srgbClr val="201E1D"/>
+                </a:solidFill>
+                <a:latin typeface="Archivo" pitchFamily="34" charset="0"/>
+                <a:ea typeface="Archivo" pitchFamily="34" charset="-122"/>
+                <a:cs typeface="Archivo" pitchFamily="34" charset="-120"/>
+              </a:rPr>
+              <a:t>Robust </a:t>
+            </a:r>
+            <a:r>
+              <a:rPr lang="en-US" sz="3150" b="1" dirty="0">
+                <a:solidFill>
+                  <a:srgbClr val="201E1D"/>
+                </a:solidFill>
+                <a:latin typeface="Archivo" pitchFamily="34" charset="0"/>
+                <a:ea typeface="Archivo" pitchFamily="34" charset="-122"/>
+                <a:cs typeface="Archivo" pitchFamily="34" charset="-120"/>
+              </a:rPr>
+              <a:t>Enough for Pro Developers.</a:t>
             </a:r>
             <a:endParaRPr lang="en-US" sz="3150" dirty="0"/>
           </a:p>
@@ -18214,7 +18255,7 @@
         <p:spPr>
           <a:xfrm>
             <a:off x="1047750" y="914400"/>
-            <a:ext cx="17811750" cy="309563"/>
+            <a:ext cx="15901307" cy="424543"/>
           </a:xfrm>
           <a:prstGeom prst="rect">
             <a:avLst/>
@@ -18224,7 +18265,7 @@
         </p:spPr>
         <p:txBody>
           <a:bodyPr wrap="square" lIns="25400" tIns="25400" rIns="25400" bIns="25400" rtlCol="0" anchor="t">
-            <a:normAutofit fontScale="92500" lnSpcReduction="10000"/>
+            <a:normAutofit/>
           </a:bodyPr>
           <a:lstStyle/>
           <a:p>
@@ -18240,7 +18281,7 @@
                 <a:ea typeface="Archivo" pitchFamily="34" charset="-122"/>
                 <a:cs typeface="Archivo" pitchFamily="34" charset="-120"/>
               </a:rPr>
-              <a:t>ONLYCOPILOTFANS — AGENTIC DEVELOPMENT FRAMEWORK</a:t>
+              <a:t>ONLYCOPILOTFANS — BC AGENTIC DEVELOPMENT FRAMEWORK</a:t>
             </a:r>
             <a:endParaRPr lang="en-US" sz="1950" dirty="0"/>
           </a:p>
@@ -18284,7 +18325,48 @@
                 <a:ea typeface="Archivo" pitchFamily="34" charset="-122"/>
                 <a:cs typeface="Archivo" pitchFamily="34" charset="-120"/>
               </a:rPr>
-              <a:t>Simple Enough for Functional Consultants. Robust Enough for Pro Developers.</a:t>
+              <a:t>Simple Enough for Functional Consultants</a:t>
+            </a:r>
+            <a:r>
+              <a:rPr lang="en-US" sz="6450" b="1" kern="0" spc="-193">
+                <a:solidFill>
+                  <a:srgbClr val="F3F2F2"/>
+                </a:solidFill>
+                <a:latin typeface="Archivo" pitchFamily="34" charset="0"/>
+                <a:ea typeface="Archivo" pitchFamily="34" charset="-122"/>
+                <a:cs typeface="Archivo" pitchFamily="34" charset="-120"/>
+              </a:rPr>
+              <a:t>. </a:t>
+            </a:r>
+          </a:p>
+          <a:p>
+            <a:pPr marL="0" indent="0" algn="l">
+              <a:lnSpc>
+                <a:spcPct val="101176"/>
+              </a:lnSpc>
+              <a:buNone/>
+            </a:pPr>
+            <a:r>
+              <a:rPr lang="en-US" sz="6450" b="1" kern="0" spc="-193">
+                <a:solidFill>
+                  <a:srgbClr val="F3F2F2"/>
+                </a:solidFill>
+                <a:latin typeface="Archivo" pitchFamily="34" charset="0"/>
+                <a:ea typeface="Archivo" pitchFamily="34" charset="-122"/>
+                <a:cs typeface="Archivo" pitchFamily="34" charset="-120"/>
+              </a:rPr>
+              <a:t>Robust </a:t>
+            </a:r>
+            <a:r>
+              <a:rPr lang="en-US" sz="6450" b="1" kern="0" spc="-193" dirty="0">
+                <a:solidFill>
+                  <a:srgbClr val="F3F2F2"/>
+                </a:solidFill>
+                <a:latin typeface="Archivo" pitchFamily="34" charset="0"/>
+                <a:ea typeface="Archivo" pitchFamily="34" charset="-122"/>
+                <a:cs typeface="Archivo" pitchFamily="34" charset="-120"/>
+              </a:rPr>
+              <a:t>Enough for Pro Developers.</a:t>
             </a:r>
             <a:endParaRPr lang="en-US" sz="6450" dirty="0"/>
           </a:p>
@@ -21598,7 +21680,7 @@
         <p:spPr>
           <a:xfrm>
             <a:off x="15544800" y="4270549"/>
-            <a:ext cx="1925538" cy="1462088"/>
+            <a:ext cx="1885950" cy="1462088"/>
           </a:xfrm>
           <a:prstGeom prst="ellipse">
             <a:avLst/>
@@ -21627,7 +21709,7 @@
         <p:spPr>
           <a:xfrm>
             <a:off x="15773400" y="4537249"/>
-            <a:ext cx="1544538" cy="966788"/>
+            <a:ext cx="1676400" cy="966788"/>
           </a:xfrm>
           <a:prstGeom prst="rect">
             <a:avLst/>
@@ -26966,8 +27048,8 @@
         </p:nvSpPr>
         <p:spPr>
           <a:xfrm>
-            <a:off x="1085850" y="4153793"/>
-            <a:ext cx="5036134" cy="1709440"/>
+            <a:off x="1085850" y="4153792"/>
+            <a:ext cx="5036134" cy="4325839"/>
           </a:xfrm>
           <a:prstGeom prst="rect">
             <a:avLst/>
@@ -26977,7 +27059,7 @@
         </p:spPr>
         <p:txBody>
           <a:bodyPr wrap="square" lIns="25400" tIns="25400" rIns="25400" bIns="25400" rtlCol="0" anchor="t">
-            <a:normAutofit lnSpcReduction="10000"/>
+            <a:normAutofit/>
           </a:bodyPr>
           <a:lstStyle/>
           <a:p>
@@ -26996,183 +27078,9 @@
                 <a:ea typeface="Archivo" pitchFamily="34" charset="-122"/>
                 <a:cs typeface="Archivo" pitchFamily="34" charset="-120"/>
               </a:rPr>
-              <a:t>All BUILD code generation. All actual code edits, including applying what Light and Reasoning report. End-to-end ownership of the ChangeLog, Object Register, ProjectMemory and TestingFeedback.md.</a:t>
-            </a:r>
-            <a:endParaRPr lang="en-US" sz="1950" dirty="0"/>
-          </a:p>
-        </p:txBody>
-      </p:sp>
-      <p:sp>
-        <p:nvSpPr>
-          <p:cNvPr id="28" name="Shape 26"/>
-          <p:cNvSpPr/>
-          <p:nvPr/>
-        </p:nvSpPr>
-        <p:spPr>
-          <a:xfrm>
-            <a:off x="6451550" y="9043988"/>
-            <a:ext cx="5384825" cy="19050"/>
-          </a:xfrm>
-          <a:prstGeom prst="rect">
-            <a:avLst/>
-          </a:prstGeom>
-          <a:solidFill>
-            <a:srgbClr val="201E1D"/>
-          </a:solidFill>
-          <a:ln/>
-        </p:spPr>
-        <p:txBody>
-          <a:bodyPr/>
-          <a:lstStyle/>
-          <a:p>
-            <a:endParaRPr lang="en-US"/>
-          </a:p>
-        </p:txBody>
-      </p:sp>
-      <p:sp>
-        <p:nvSpPr>
-          <p:cNvPr id="29" name="Shape 27"/>
-          <p:cNvSpPr/>
-          <p:nvPr/>
-        </p:nvSpPr>
-        <p:spPr>
-          <a:xfrm>
-            <a:off x="6451550" y="3320355"/>
-            <a:ext cx="5384825" cy="133350"/>
-          </a:xfrm>
-          <a:prstGeom prst="rect">
-            <a:avLst/>
-          </a:prstGeom>
-          <a:solidFill>
-            <a:srgbClr val="0A7C85"/>
-          </a:solidFill>
-          <a:ln/>
-        </p:spPr>
-        <p:txBody>
-          <a:bodyPr/>
-          <a:lstStyle/>
-          <a:p>
-            <a:endParaRPr lang="en-US"/>
-          </a:p>
-        </p:txBody>
-      </p:sp>
-      <p:sp>
-        <p:nvSpPr>
-          <p:cNvPr id="30" name="Shape 28"/>
-          <p:cNvSpPr/>
-          <p:nvPr/>
-        </p:nvSpPr>
-        <p:spPr>
-          <a:xfrm>
-            <a:off x="6451550" y="3320355"/>
-            <a:ext cx="19050" cy="5742682"/>
-          </a:xfrm>
-          <a:prstGeom prst="rect">
-            <a:avLst/>
-          </a:prstGeom>
-          <a:solidFill>
-            <a:srgbClr val="201E1D"/>
-          </a:solidFill>
-          <a:ln/>
-        </p:spPr>
-        <p:txBody>
-          <a:bodyPr/>
-          <a:lstStyle/>
-          <a:p>
-            <a:endParaRPr lang="en-US"/>
-          </a:p>
-        </p:txBody>
-      </p:sp>
-      <p:sp>
-        <p:nvSpPr>
-          <p:cNvPr id="31" name="Shape 29"/>
-          <p:cNvSpPr/>
-          <p:nvPr/>
-        </p:nvSpPr>
-        <p:spPr>
-          <a:xfrm>
-            <a:off x="11817325" y="3320355"/>
-            <a:ext cx="19050" cy="5742682"/>
-          </a:xfrm>
-          <a:prstGeom prst="rect">
-            <a:avLst/>
-          </a:prstGeom>
-          <a:solidFill>
-            <a:srgbClr val="201E1D"/>
-          </a:solidFill>
-          <a:ln/>
-        </p:spPr>
-        <p:txBody>
-          <a:bodyPr/>
-          <a:lstStyle/>
-          <a:p>
-            <a:endParaRPr lang="en-US"/>
-          </a:p>
-        </p:txBody>
-      </p:sp>
-      <p:sp>
-        <p:nvSpPr>
-          <p:cNvPr id="32" name="Text 30"/>
-          <p:cNvSpPr/>
-          <p:nvPr/>
-        </p:nvSpPr>
-        <p:spPr>
-          <a:xfrm>
-            <a:off x="6699200" y="3644205"/>
-            <a:ext cx="5378477" cy="433388"/>
-          </a:xfrm>
-          <a:prstGeom prst="rect">
-            <a:avLst/>
-          </a:prstGeom>
-          <a:noFill/>
-          <a:ln/>
-        </p:spPr>
-        <p:txBody>
-          <a:bodyPr wrap="square" lIns="25400" tIns="25400" rIns="25400" bIns="25400" rtlCol="0" anchor="t">
-            <a:normAutofit fontScale="92500" lnSpcReduction="10000"/>
-          </a:bodyPr>
-          <a:lstStyle/>
-          <a:p>
-            <a:pPr marL="0" indent="0" algn="l">
-              <a:buNone/>
-            </a:pPr>
-            <a:r>
-              <a:rPr lang="en-US" sz="2850" b="1" dirty="0">
-                <a:solidFill>
-                  <a:srgbClr val="201E1D"/>
-                </a:solidFill>
-                <a:latin typeface="Archivo" pitchFamily="34" charset="0"/>
-                <a:ea typeface="Archivo" pitchFamily="34" charset="-122"/>
-                <a:cs typeface="Archivo" pitchFamily="34" charset="-120"/>
-              </a:rPr>
-              <a:t>LIGHT ROLE</a:t>
-            </a:r>
-            <a:endParaRPr lang="en-US" sz="2850" dirty="0"/>
-          </a:p>
-        </p:txBody>
-      </p:sp>
-      <p:sp>
-        <p:nvSpPr>
-          <p:cNvPr id="33" name="Text 31"/>
-          <p:cNvSpPr/>
-          <p:nvPr/>
-        </p:nvSpPr>
-        <p:spPr>
-          <a:xfrm>
-            <a:off x="6699200" y="4153793"/>
-            <a:ext cx="5036211" cy="1375172"/>
-          </a:xfrm>
-          <a:prstGeom prst="rect">
-            <a:avLst/>
-          </a:prstGeom>
-          <a:noFill/>
-          <a:ln/>
-        </p:spPr>
-        <p:txBody>
-          <a:bodyPr wrap="square" lIns="25400" tIns="25400" rIns="25400" bIns="25400" rtlCol="0" anchor="t">
-            <a:normAutofit lnSpcReduction="10000"/>
-          </a:bodyPr>
-          <a:lstStyle/>
+              <a:t>Runs in Primary Agent Session</a:t>
+            </a:r>
+          </a:p>
           <a:p>
             <a:pPr marL="0" indent="0" algn="l">
               <a:lnSpc>
@@ -27180,233 +27088,15 @@
               </a:lnSpc>
               <a:buNone/>
             </a:pPr>
-            <a:r>
-              <a:rPr lang="en-US" sz="1950" dirty="0">
-                <a:solidFill>
-                  <a:srgbClr val="201E1D"/>
-                </a:solidFill>
-                <a:latin typeface="Archivo" pitchFamily="34" charset="0"/>
-                <a:ea typeface="Archivo" pitchFamily="34" charset="-122"/>
-                <a:cs typeface="Archivo" pitchFamily="34" charset="-120"/>
-              </a:rPr>
-              <a:t>The Step 05 post-generation pre-flight pass only — required props, Rec.-qualification, dead code, indentation, permission-set coverage, symbol verification.</a:t>
-            </a:r>
-            <a:endParaRPr lang="en-US" sz="1950" dirty="0"/>
-          </a:p>
-        </p:txBody>
-      </p:sp>
-      <p:sp>
-        <p:nvSpPr>
-          <p:cNvPr id="34" name="Text 32"/>
-          <p:cNvSpPr/>
-          <p:nvPr/>
-        </p:nvSpPr>
-        <p:spPr>
-          <a:xfrm>
-            <a:off x="6699200" y="8591550"/>
-            <a:ext cx="5378477" cy="300038"/>
-          </a:xfrm>
-          <a:prstGeom prst="rect">
-            <a:avLst/>
-          </a:prstGeom>
-          <a:noFill/>
-          <a:ln/>
-        </p:spPr>
-        <p:txBody>
-          <a:bodyPr wrap="square" lIns="25400" tIns="25400" rIns="25400" bIns="25400" rtlCol="0" anchor="t">
-            <a:normAutofit fontScale="92500" lnSpcReduction="10000"/>
-          </a:bodyPr>
-          <a:lstStyle/>
-          <a:p>
-            <a:pPr marL="0" indent="0" algn="l">
-              <a:buNone/>
-            </a:pPr>
-            <a:r>
-              <a:rPr lang="en-US" sz="1875" dirty="0">
-                <a:solidFill>
-                  <a:srgbClr val="444141"/>
-                </a:solidFill>
-                <a:latin typeface="Archivo" pitchFamily="34" charset="0"/>
-                <a:ea typeface="Archivo" pitchFamily="34" charset="-122"/>
-                <a:cs typeface="Archivo" pitchFamily="34" charset="-120"/>
-              </a:rPr>
-              <a:t>Reports findings. Never edits code.</a:t>
-            </a:r>
-            <a:endParaRPr lang="en-US" sz="1875" dirty="0"/>
-          </a:p>
-        </p:txBody>
-      </p:sp>
-      <p:sp>
-        <p:nvSpPr>
-          <p:cNvPr id="35" name="Shape 33"/>
-          <p:cNvSpPr/>
-          <p:nvPr/>
-        </p:nvSpPr>
-        <p:spPr>
-          <a:xfrm>
-            <a:off x="12064975" y="9043988"/>
-            <a:ext cx="5384825" cy="19050"/>
-          </a:xfrm>
-          <a:prstGeom prst="rect">
-            <a:avLst/>
-          </a:prstGeom>
-          <a:solidFill>
-            <a:srgbClr val="201E1D"/>
-          </a:solidFill>
-          <a:ln/>
-        </p:spPr>
-        <p:txBody>
-          <a:bodyPr/>
-          <a:lstStyle/>
-          <a:p>
-            <a:endParaRPr lang="en-US"/>
-          </a:p>
-        </p:txBody>
-      </p:sp>
-      <p:sp>
-        <p:nvSpPr>
-          <p:cNvPr id="36" name="Shape 34"/>
-          <p:cNvSpPr/>
-          <p:nvPr/>
-        </p:nvSpPr>
-        <p:spPr>
-          <a:xfrm>
-            <a:off x="12064975" y="3320355"/>
-            <a:ext cx="5384825" cy="133350"/>
-          </a:xfrm>
-          <a:prstGeom prst="rect">
-            <a:avLst/>
-          </a:prstGeom>
-          <a:solidFill>
-            <a:srgbClr val="6B4FC4"/>
-          </a:solidFill>
-          <a:ln/>
-        </p:spPr>
-        <p:txBody>
-          <a:bodyPr/>
-          <a:lstStyle/>
-          <a:p>
-            <a:endParaRPr lang="en-US"/>
-          </a:p>
-        </p:txBody>
-      </p:sp>
-      <p:sp>
-        <p:nvSpPr>
-          <p:cNvPr id="37" name="Shape 35"/>
-          <p:cNvSpPr/>
-          <p:nvPr/>
-        </p:nvSpPr>
-        <p:spPr>
-          <a:xfrm>
-            <a:off x="12064975" y="3320355"/>
-            <a:ext cx="19050" cy="5742682"/>
-          </a:xfrm>
-          <a:prstGeom prst="rect">
-            <a:avLst/>
-          </a:prstGeom>
-          <a:solidFill>
-            <a:srgbClr val="201E1D"/>
-          </a:solidFill>
-          <a:ln/>
-        </p:spPr>
-        <p:txBody>
-          <a:bodyPr/>
-          <a:lstStyle/>
-          <a:p>
-            <a:endParaRPr lang="en-US"/>
-          </a:p>
-        </p:txBody>
-      </p:sp>
-      <p:sp>
-        <p:nvSpPr>
-          <p:cNvPr id="38" name="Shape 36"/>
-          <p:cNvSpPr/>
-          <p:nvPr/>
-        </p:nvSpPr>
-        <p:spPr>
-          <a:xfrm>
-            <a:off x="17430750" y="3320355"/>
-            <a:ext cx="19050" cy="5742682"/>
-          </a:xfrm>
-          <a:prstGeom prst="rect">
-            <a:avLst/>
-          </a:prstGeom>
-          <a:solidFill>
-            <a:srgbClr val="201E1D"/>
-          </a:solidFill>
-          <a:ln/>
-        </p:spPr>
-        <p:txBody>
-          <a:bodyPr/>
-          <a:lstStyle/>
-          <a:p>
-            <a:endParaRPr lang="en-US"/>
-          </a:p>
-        </p:txBody>
-      </p:sp>
-      <p:sp>
-        <p:nvSpPr>
-          <p:cNvPr id="39" name="Text 37"/>
-          <p:cNvSpPr/>
-          <p:nvPr/>
-        </p:nvSpPr>
-        <p:spPr>
-          <a:xfrm>
-            <a:off x="12312625" y="3644205"/>
-            <a:ext cx="5378477" cy="433388"/>
-          </a:xfrm>
-          <a:prstGeom prst="rect">
-            <a:avLst/>
-          </a:prstGeom>
-          <a:noFill/>
-          <a:ln/>
-        </p:spPr>
-        <p:txBody>
-          <a:bodyPr wrap="square" lIns="25400" tIns="25400" rIns="25400" bIns="25400" rtlCol="0" anchor="t">
-            <a:normAutofit fontScale="92500" lnSpcReduction="10000"/>
-          </a:bodyPr>
-          <a:lstStyle/>
-          <a:p>
-            <a:pPr marL="0" indent="0" algn="l">
-              <a:buNone/>
-            </a:pPr>
-            <a:r>
-              <a:rPr lang="en-US" sz="2850" b="1" dirty="0">
-                <a:solidFill>
-                  <a:srgbClr val="201E1D"/>
-                </a:solidFill>
-                <a:latin typeface="Archivo" pitchFamily="34" charset="0"/>
-                <a:ea typeface="Archivo" pitchFamily="34" charset="-122"/>
-                <a:cs typeface="Archivo" pitchFamily="34" charset="-120"/>
-              </a:rPr>
-              <a:t>REASONING ROLE</a:t>
-            </a:r>
-            <a:endParaRPr lang="en-US" sz="2850" dirty="0"/>
-          </a:p>
-        </p:txBody>
-      </p:sp>
-      <p:sp>
-        <p:nvSpPr>
-          <p:cNvPr id="40" name="Text 38"/>
-          <p:cNvSpPr/>
-          <p:nvPr/>
-        </p:nvSpPr>
-        <p:spPr>
-          <a:xfrm>
-            <a:off x="12312625" y="4153793"/>
-            <a:ext cx="5036211" cy="1375172"/>
-          </a:xfrm>
-          <a:prstGeom prst="rect">
-            <a:avLst/>
-          </a:prstGeom>
-          <a:noFill/>
-          <a:ln/>
-        </p:spPr>
-        <p:txBody>
-          <a:bodyPr wrap="square" lIns="25400" tIns="25400" rIns="25400" bIns="25400" rtlCol="0" anchor="t">
-            <a:normAutofit lnSpcReduction="10000"/>
-          </a:bodyPr>
-          <a:lstStyle/>
+            <a:endParaRPr lang="en-US" sz="1950" dirty="0">
+              <a:solidFill>
+                <a:srgbClr val="201E1D"/>
+              </a:solidFill>
+              <a:latin typeface="Archivo" pitchFamily="34" charset="0"/>
+              <a:ea typeface="Archivo" pitchFamily="34" charset="-122"/>
+              <a:cs typeface="Archivo" pitchFamily="34" charset="-120"/>
+            </a:endParaRPr>
+          </a:p>
           <a:p>
             <a:pPr marL="0" indent="0" algn="l">
               <a:lnSpc>
@@ -27423,7 +27113,682 @@
                 <a:ea typeface="Archivo" pitchFamily="34" charset="-122"/>
                 <a:cs typeface="Archivo" pitchFamily="34" charset="-120"/>
               </a:rPr>
+              <a:t>All BUILD code generation. All actual code edits, including applying what Light and Reasoning report. End-to-end ownership of the ChangeLog, Object Register, ProjectMemory and </a:t>
+            </a:r>
+            <a:r>
+              <a:rPr lang="en-US" sz="1950" dirty="0" err="1">
+                <a:solidFill>
+                  <a:srgbClr val="201E1D"/>
+                </a:solidFill>
+                <a:latin typeface="Archivo" pitchFamily="34" charset="0"/>
+                <a:ea typeface="Archivo" pitchFamily="34" charset="-122"/>
+                <a:cs typeface="Archivo" pitchFamily="34" charset="-120"/>
+              </a:rPr>
+              <a:t>TestingFeedback.md</a:t>
+            </a:r>
+            <a:r>
+              <a:rPr lang="en-US" sz="1950" dirty="0">
+                <a:solidFill>
+                  <a:srgbClr val="201E1D"/>
+                </a:solidFill>
+                <a:latin typeface="Archivo" pitchFamily="34" charset="0"/>
+                <a:ea typeface="Archivo" pitchFamily="34" charset="-122"/>
+                <a:cs typeface="Archivo" pitchFamily="34" charset="-120"/>
+              </a:rPr>
+              <a:t>.</a:t>
+            </a:r>
+          </a:p>
+          <a:p>
+            <a:pPr marL="0" indent="0" algn="l">
+              <a:lnSpc>
+                <a:spcPct val="123158"/>
+              </a:lnSpc>
+              <a:buNone/>
+            </a:pPr>
+            <a:endParaRPr lang="en-US" sz="1950" dirty="0">
+              <a:solidFill>
+                <a:srgbClr val="201E1D"/>
+              </a:solidFill>
+              <a:latin typeface="Archivo" pitchFamily="34" charset="0"/>
+              <a:cs typeface="Archivo" pitchFamily="34" charset="-120"/>
+            </a:endParaRPr>
+          </a:p>
+          <a:p>
+            <a:pPr marL="0" indent="0" algn="l">
+              <a:lnSpc>
+                <a:spcPct val="123158"/>
+              </a:lnSpc>
+              <a:buNone/>
+            </a:pPr>
+            <a:r>
+              <a:rPr lang="en-US" sz="1950" b="1" dirty="0">
+                <a:solidFill>
+                  <a:srgbClr val="201E1D"/>
+                </a:solidFill>
+                <a:latin typeface="Archivo" pitchFamily="34" charset="0"/>
+                <a:cs typeface="Archivo" pitchFamily="34" charset="-120"/>
+              </a:rPr>
+              <a:t>IDEAL MODEL: </a:t>
+            </a:r>
+            <a:r>
+              <a:rPr lang="en-US" sz="1950" dirty="0">
+                <a:solidFill>
+                  <a:srgbClr val="201E1D"/>
+                </a:solidFill>
+                <a:latin typeface="Archivo" pitchFamily="34" charset="0"/>
+                <a:cs typeface="Archivo" pitchFamily="34" charset="-120"/>
+              </a:rPr>
+              <a:t>A reliable, cost-effective daily driver like Claude Sonnet</a:t>
+            </a:r>
+            <a:endParaRPr lang="en-US" sz="1950" dirty="0"/>
+          </a:p>
+        </p:txBody>
+      </p:sp>
+      <p:sp>
+        <p:nvSpPr>
+          <p:cNvPr id="28" name="Shape 26"/>
+          <p:cNvSpPr/>
+          <p:nvPr/>
+        </p:nvSpPr>
+        <p:spPr>
+          <a:xfrm>
+            <a:off x="6451550" y="9043988"/>
+            <a:ext cx="5384825" cy="19050"/>
+          </a:xfrm>
+          <a:prstGeom prst="rect">
+            <a:avLst/>
+          </a:prstGeom>
+          <a:solidFill>
+            <a:srgbClr val="201E1D"/>
+          </a:solidFill>
+          <a:ln/>
+        </p:spPr>
+        <p:txBody>
+          <a:bodyPr/>
+          <a:lstStyle/>
+          <a:p>
+            <a:endParaRPr lang="en-US"/>
+          </a:p>
+        </p:txBody>
+      </p:sp>
+      <p:sp>
+        <p:nvSpPr>
+          <p:cNvPr id="29" name="Shape 27"/>
+          <p:cNvSpPr/>
+          <p:nvPr/>
+        </p:nvSpPr>
+        <p:spPr>
+          <a:xfrm>
+            <a:off x="6451550" y="3320355"/>
+            <a:ext cx="5384825" cy="133350"/>
+          </a:xfrm>
+          <a:prstGeom prst="rect">
+            <a:avLst/>
+          </a:prstGeom>
+          <a:solidFill>
+            <a:srgbClr val="0A7C85"/>
+          </a:solidFill>
+          <a:ln/>
+        </p:spPr>
+        <p:txBody>
+          <a:bodyPr/>
+          <a:lstStyle/>
+          <a:p>
+            <a:endParaRPr lang="en-US"/>
+          </a:p>
+        </p:txBody>
+      </p:sp>
+      <p:sp>
+        <p:nvSpPr>
+          <p:cNvPr id="30" name="Shape 28"/>
+          <p:cNvSpPr/>
+          <p:nvPr/>
+        </p:nvSpPr>
+        <p:spPr>
+          <a:xfrm>
+            <a:off x="6451550" y="3320355"/>
+            <a:ext cx="19050" cy="5742682"/>
+          </a:xfrm>
+          <a:prstGeom prst="rect">
+            <a:avLst/>
+          </a:prstGeom>
+          <a:solidFill>
+            <a:srgbClr val="201E1D"/>
+          </a:solidFill>
+          <a:ln/>
+        </p:spPr>
+        <p:txBody>
+          <a:bodyPr/>
+          <a:lstStyle/>
+          <a:p>
+            <a:endParaRPr lang="en-US"/>
+          </a:p>
+        </p:txBody>
+      </p:sp>
+      <p:sp>
+        <p:nvSpPr>
+          <p:cNvPr id="31" name="Shape 29"/>
+          <p:cNvSpPr/>
+          <p:nvPr/>
+        </p:nvSpPr>
+        <p:spPr>
+          <a:xfrm>
+            <a:off x="11817325" y="3320355"/>
+            <a:ext cx="19050" cy="5742682"/>
+          </a:xfrm>
+          <a:prstGeom prst="rect">
+            <a:avLst/>
+          </a:prstGeom>
+          <a:solidFill>
+            <a:srgbClr val="201E1D"/>
+          </a:solidFill>
+          <a:ln/>
+        </p:spPr>
+        <p:txBody>
+          <a:bodyPr/>
+          <a:lstStyle/>
+          <a:p>
+            <a:endParaRPr lang="en-US"/>
+          </a:p>
+        </p:txBody>
+      </p:sp>
+      <p:sp>
+        <p:nvSpPr>
+          <p:cNvPr id="32" name="Text 30"/>
+          <p:cNvSpPr/>
+          <p:nvPr/>
+        </p:nvSpPr>
+        <p:spPr>
+          <a:xfrm>
+            <a:off x="6699200" y="3644205"/>
+            <a:ext cx="5378477" cy="433388"/>
+          </a:xfrm>
+          <a:prstGeom prst="rect">
+            <a:avLst/>
+          </a:prstGeom>
+          <a:noFill/>
+          <a:ln/>
+        </p:spPr>
+        <p:txBody>
+          <a:bodyPr wrap="square" lIns="25400" tIns="25400" rIns="25400" bIns="25400" rtlCol="0" anchor="t">
+            <a:normAutofit fontScale="92500" lnSpcReduction="10000"/>
+          </a:bodyPr>
+          <a:lstStyle/>
+          <a:p>
+            <a:pPr marL="0" indent="0" algn="l">
+              <a:buNone/>
+            </a:pPr>
+            <a:r>
+              <a:rPr lang="en-US" sz="2850" b="1" dirty="0">
+                <a:solidFill>
+                  <a:srgbClr val="201E1D"/>
+                </a:solidFill>
+                <a:latin typeface="Archivo" pitchFamily="34" charset="0"/>
+                <a:ea typeface="Archivo" pitchFamily="34" charset="-122"/>
+                <a:cs typeface="Archivo" pitchFamily="34" charset="-120"/>
+              </a:rPr>
+              <a:t>LIGHT ROLE</a:t>
+            </a:r>
+            <a:endParaRPr lang="en-US" sz="2850" dirty="0"/>
+          </a:p>
+        </p:txBody>
+      </p:sp>
+      <p:sp>
+        <p:nvSpPr>
+          <p:cNvPr id="33" name="Text 31"/>
+          <p:cNvSpPr/>
+          <p:nvPr/>
+        </p:nvSpPr>
+        <p:spPr>
+          <a:xfrm>
+            <a:off x="6699200" y="4153793"/>
+            <a:ext cx="5036211" cy="3985320"/>
+          </a:xfrm>
+          <a:prstGeom prst="rect">
+            <a:avLst/>
+          </a:prstGeom>
+          <a:noFill/>
+          <a:ln/>
+        </p:spPr>
+        <p:txBody>
+          <a:bodyPr wrap="square" lIns="25400" tIns="25400" rIns="25400" bIns="25400" rtlCol="0" anchor="t">
+            <a:normAutofit/>
+          </a:bodyPr>
+          <a:lstStyle/>
+          <a:p>
+            <a:pPr marL="0" indent="0" algn="l">
+              <a:lnSpc>
+                <a:spcPct val="123158"/>
+              </a:lnSpc>
+              <a:buNone/>
+            </a:pPr>
+            <a:r>
+              <a:rPr lang="en-US" sz="1950" dirty="0">
+                <a:solidFill>
+                  <a:srgbClr val="201E1D"/>
+                </a:solidFill>
+                <a:latin typeface="Archivo" pitchFamily="34" charset="0"/>
+                <a:ea typeface="Archivo" pitchFamily="34" charset="-122"/>
+                <a:cs typeface="Archivo" pitchFamily="34" charset="-120"/>
+              </a:rPr>
+              <a:t>Spawned as a Sub-Agent</a:t>
+            </a:r>
+          </a:p>
+          <a:p>
+            <a:pPr marL="0" indent="0" algn="l">
+              <a:lnSpc>
+                <a:spcPct val="123158"/>
+              </a:lnSpc>
+              <a:buNone/>
+            </a:pPr>
+            <a:endParaRPr lang="en-US" sz="1950" dirty="0">
+              <a:solidFill>
+                <a:srgbClr val="201E1D"/>
+              </a:solidFill>
+              <a:latin typeface="Archivo" pitchFamily="34" charset="0"/>
+              <a:ea typeface="Archivo" pitchFamily="34" charset="-122"/>
+              <a:cs typeface="Archivo" pitchFamily="34" charset="-120"/>
+            </a:endParaRPr>
+          </a:p>
+          <a:p>
+            <a:pPr marL="0" indent="0" algn="l">
+              <a:lnSpc>
+                <a:spcPct val="123158"/>
+              </a:lnSpc>
+              <a:buNone/>
+            </a:pPr>
+            <a:r>
+              <a:rPr lang="en-US" sz="1950" dirty="0">
+                <a:solidFill>
+                  <a:srgbClr val="201E1D"/>
+                </a:solidFill>
+                <a:latin typeface="Archivo" pitchFamily="34" charset="0"/>
+                <a:ea typeface="Archivo" pitchFamily="34" charset="-122"/>
+                <a:cs typeface="Archivo" pitchFamily="34" charset="-120"/>
+              </a:rPr>
+              <a:t>The Step 05 post-generation pre-flight pass only — required props, Rec.-qualification, dead code, indentation, permission-set coverage, symbol verification.</a:t>
+            </a:r>
+          </a:p>
+          <a:p>
+            <a:pPr marL="0" indent="0" algn="l">
+              <a:lnSpc>
+                <a:spcPct val="123158"/>
+              </a:lnSpc>
+              <a:buNone/>
+            </a:pPr>
+            <a:endParaRPr lang="en-US" sz="1950" dirty="0">
+              <a:solidFill>
+                <a:srgbClr val="201E1D"/>
+              </a:solidFill>
+              <a:latin typeface="Archivo" pitchFamily="34" charset="0"/>
+              <a:cs typeface="Archivo" pitchFamily="34" charset="-120"/>
+            </a:endParaRPr>
+          </a:p>
+          <a:p>
+            <a:pPr marL="0" indent="0" algn="l">
+              <a:lnSpc>
+                <a:spcPct val="123158"/>
+              </a:lnSpc>
+              <a:buNone/>
+            </a:pPr>
+            <a:r>
+              <a:rPr lang="en-US" sz="1950" b="1" dirty="0">
+                <a:solidFill>
+                  <a:srgbClr val="201E1D"/>
+                </a:solidFill>
+                <a:latin typeface="Archivo" pitchFamily="34" charset="0"/>
+                <a:cs typeface="Archivo" pitchFamily="34" charset="-120"/>
+              </a:rPr>
+              <a:t>IDEAL MODEL:</a:t>
+            </a:r>
+            <a:r>
+              <a:rPr lang="en-US" sz="1950" dirty="0">
+                <a:solidFill>
+                  <a:srgbClr val="201E1D"/>
+                </a:solidFill>
+                <a:latin typeface="Archivo" pitchFamily="34" charset="0"/>
+                <a:cs typeface="Archivo" pitchFamily="34" charset="-120"/>
+              </a:rPr>
+              <a:t> A low-cost, fast and lightweight like Claude Haiku</a:t>
+            </a:r>
+          </a:p>
+        </p:txBody>
+      </p:sp>
+      <p:sp>
+        <p:nvSpPr>
+          <p:cNvPr id="34" name="Text 32"/>
+          <p:cNvSpPr/>
+          <p:nvPr/>
+        </p:nvSpPr>
+        <p:spPr>
+          <a:xfrm>
+            <a:off x="6699200" y="8591550"/>
+            <a:ext cx="5378477" cy="300038"/>
+          </a:xfrm>
+          <a:prstGeom prst="rect">
+            <a:avLst/>
+          </a:prstGeom>
+          <a:noFill/>
+          <a:ln/>
+        </p:spPr>
+        <p:txBody>
+          <a:bodyPr wrap="square" lIns="25400" tIns="25400" rIns="25400" bIns="25400" rtlCol="0" anchor="t">
+            <a:normAutofit fontScale="92500" lnSpcReduction="10000"/>
+          </a:bodyPr>
+          <a:lstStyle/>
+          <a:p>
+            <a:pPr marL="0" indent="0" algn="l">
+              <a:buNone/>
+            </a:pPr>
+            <a:r>
+              <a:rPr lang="en-US" sz="1875" dirty="0">
+                <a:solidFill>
+                  <a:srgbClr val="444141"/>
+                </a:solidFill>
+                <a:latin typeface="Archivo" pitchFamily="34" charset="0"/>
+                <a:ea typeface="Archivo" pitchFamily="34" charset="-122"/>
+                <a:cs typeface="Archivo" pitchFamily="34" charset="-120"/>
+              </a:rPr>
+              <a:t>Reports findings. Never edits code.</a:t>
+            </a:r>
+            <a:endParaRPr lang="en-US" sz="1875" dirty="0"/>
+          </a:p>
+        </p:txBody>
+      </p:sp>
+      <p:sp>
+        <p:nvSpPr>
+          <p:cNvPr id="35" name="Shape 33"/>
+          <p:cNvSpPr/>
+          <p:nvPr/>
+        </p:nvSpPr>
+        <p:spPr>
+          <a:xfrm>
+            <a:off x="12064975" y="9043988"/>
+            <a:ext cx="5384825" cy="19050"/>
+          </a:xfrm>
+          <a:prstGeom prst="rect">
+            <a:avLst/>
+          </a:prstGeom>
+          <a:solidFill>
+            <a:srgbClr val="201E1D"/>
+          </a:solidFill>
+          <a:ln/>
+        </p:spPr>
+        <p:txBody>
+          <a:bodyPr/>
+          <a:lstStyle/>
+          <a:p>
+            <a:endParaRPr lang="en-US"/>
+          </a:p>
+        </p:txBody>
+      </p:sp>
+      <p:sp>
+        <p:nvSpPr>
+          <p:cNvPr id="36" name="Shape 34"/>
+          <p:cNvSpPr/>
+          <p:nvPr/>
+        </p:nvSpPr>
+        <p:spPr>
+          <a:xfrm>
+            <a:off x="12064975" y="3320355"/>
+            <a:ext cx="5384825" cy="133350"/>
+          </a:xfrm>
+          <a:prstGeom prst="rect">
+            <a:avLst/>
+          </a:prstGeom>
+          <a:solidFill>
+            <a:srgbClr val="6B4FC4"/>
+          </a:solidFill>
+          <a:ln/>
+        </p:spPr>
+        <p:txBody>
+          <a:bodyPr/>
+          <a:lstStyle/>
+          <a:p>
+            <a:endParaRPr lang="en-US"/>
+          </a:p>
+        </p:txBody>
+      </p:sp>
+      <p:sp>
+        <p:nvSpPr>
+          <p:cNvPr id="37" name="Shape 35"/>
+          <p:cNvSpPr/>
+          <p:nvPr/>
+        </p:nvSpPr>
+        <p:spPr>
+          <a:xfrm>
+            <a:off x="12064975" y="3320355"/>
+            <a:ext cx="19050" cy="5742682"/>
+          </a:xfrm>
+          <a:prstGeom prst="rect">
+            <a:avLst/>
+          </a:prstGeom>
+          <a:solidFill>
+            <a:srgbClr val="201E1D"/>
+          </a:solidFill>
+          <a:ln/>
+        </p:spPr>
+        <p:txBody>
+          <a:bodyPr/>
+          <a:lstStyle/>
+          <a:p>
+            <a:endParaRPr lang="en-US"/>
+          </a:p>
+        </p:txBody>
+      </p:sp>
+      <p:sp>
+        <p:nvSpPr>
+          <p:cNvPr id="38" name="Shape 36"/>
+          <p:cNvSpPr/>
+          <p:nvPr/>
+        </p:nvSpPr>
+        <p:spPr>
+          <a:xfrm>
+            <a:off x="17430750" y="3320355"/>
+            <a:ext cx="19050" cy="5742682"/>
+          </a:xfrm>
+          <a:prstGeom prst="rect">
+            <a:avLst/>
+          </a:prstGeom>
+          <a:solidFill>
+            <a:srgbClr val="201E1D"/>
+          </a:solidFill>
+          <a:ln/>
+        </p:spPr>
+        <p:txBody>
+          <a:bodyPr/>
+          <a:lstStyle/>
+          <a:p>
+            <a:endParaRPr lang="en-US"/>
+          </a:p>
+        </p:txBody>
+      </p:sp>
+      <p:sp>
+        <p:nvSpPr>
+          <p:cNvPr id="39" name="Text 37"/>
+          <p:cNvSpPr/>
+          <p:nvPr/>
+        </p:nvSpPr>
+        <p:spPr>
+          <a:xfrm>
+            <a:off x="12312625" y="3644205"/>
+            <a:ext cx="5378477" cy="433388"/>
+          </a:xfrm>
+          <a:prstGeom prst="rect">
+            <a:avLst/>
+          </a:prstGeom>
+          <a:noFill/>
+          <a:ln/>
+        </p:spPr>
+        <p:txBody>
+          <a:bodyPr wrap="square" lIns="25400" tIns="25400" rIns="25400" bIns="25400" rtlCol="0" anchor="t">
+            <a:normAutofit fontScale="92500" lnSpcReduction="10000"/>
+          </a:bodyPr>
+          <a:lstStyle/>
+          <a:p>
+            <a:pPr marL="0" indent="0" algn="l">
+              <a:buNone/>
+            </a:pPr>
+            <a:r>
+              <a:rPr lang="en-US" sz="2850" b="1" dirty="0">
+                <a:solidFill>
+                  <a:srgbClr val="201E1D"/>
+                </a:solidFill>
+                <a:latin typeface="Archivo" pitchFamily="34" charset="0"/>
+                <a:ea typeface="Archivo" pitchFamily="34" charset="-122"/>
+                <a:cs typeface="Archivo" pitchFamily="34" charset="-120"/>
+              </a:rPr>
+              <a:t>REASONING ROLE</a:t>
+            </a:r>
+            <a:endParaRPr lang="en-US" sz="2850" dirty="0"/>
+          </a:p>
+        </p:txBody>
+      </p:sp>
+      <p:sp>
+        <p:nvSpPr>
+          <p:cNvPr id="40" name="Text 38"/>
+          <p:cNvSpPr/>
+          <p:nvPr/>
+        </p:nvSpPr>
+        <p:spPr>
+          <a:xfrm>
+            <a:off x="12312625" y="4153793"/>
+            <a:ext cx="5036211" cy="4147244"/>
+          </a:xfrm>
+          <a:prstGeom prst="rect">
+            <a:avLst/>
+          </a:prstGeom>
+          <a:noFill/>
+          <a:ln/>
+        </p:spPr>
+        <p:txBody>
+          <a:bodyPr wrap="square" lIns="25400" tIns="25400" rIns="25400" bIns="25400" rtlCol="0" anchor="t">
+            <a:normAutofit lnSpcReduction="10000"/>
+          </a:bodyPr>
+          <a:lstStyle/>
+          <a:p>
+            <a:pPr marL="0" indent="0" algn="l">
+              <a:lnSpc>
+                <a:spcPct val="123158"/>
+              </a:lnSpc>
+              <a:buNone/>
+            </a:pPr>
+            <a:r>
+              <a:rPr lang="en-US" sz="1950" dirty="0">
+                <a:solidFill>
+                  <a:srgbClr val="201E1D"/>
+                </a:solidFill>
+                <a:latin typeface="Archivo" pitchFamily="34" charset="0"/>
+                <a:ea typeface="Archivo" pitchFamily="34" charset="-122"/>
+                <a:cs typeface="Archivo" pitchFamily="34" charset="-120"/>
+              </a:rPr>
+              <a:t>Spawned as a Sub-Agent</a:t>
+            </a:r>
+          </a:p>
+          <a:p>
+            <a:pPr marL="0" indent="0" algn="l">
+              <a:lnSpc>
+                <a:spcPct val="123158"/>
+              </a:lnSpc>
+              <a:buNone/>
+            </a:pPr>
+            <a:endParaRPr lang="en-US" sz="1950" dirty="0">
+              <a:solidFill>
+                <a:srgbClr val="201E1D"/>
+              </a:solidFill>
+              <a:latin typeface="Archivo" pitchFamily="34" charset="0"/>
+              <a:ea typeface="Archivo" pitchFamily="34" charset="-122"/>
+              <a:cs typeface="Archivo" pitchFamily="34" charset="-120"/>
+            </a:endParaRPr>
+          </a:p>
+          <a:p>
+            <a:pPr marL="0" indent="0" algn="l">
+              <a:lnSpc>
+                <a:spcPct val="123158"/>
+              </a:lnSpc>
+              <a:buNone/>
+            </a:pPr>
+            <a:r>
+              <a:rPr lang="en-US" sz="1950" dirty="0">
+                <a:solidFill>
+                  <a:srgbClr val="201E1D"/>
+                </a:solidFill>
+                <a:latin typeface="Archivo" pitchFamily="34" charset="0"/>
+                <a:ea typeface="Archivo" pitchFamily="34" charset="-122"/>
+                <a:cs typeface="Archivo" pitchFamily="34" charset="-120"/>
+              </a:rPr>
               <a:t>Sanity Check (04), Gap-Fit Test (08), Code Review (10), FRD (02) and TDD (03) authorship, root-cause troubleshooting (07), diagnosing testing-feedback reports.</a:t>
+            </a:r>
+          </a:p>
+          <a:p>
+            <a:pPr marL="0" indent="0" algn="l">
+              <a:lnSpc>
+                <a:spcPct val="123158"/>
+              </a:lnSpc>
+              <a:buNone/>
+            </a:pPr>
+            <a:endParaRPr lang="en-US" sz="1950" dirty="0">
+              <a:solidFill>
+                <a:srgbClr val="201E1D"/>
+              </a:solidFill>
+              <a:latin typeface="Archivo" pitchFamily="34" charset="0"/>
+              <a:cs typeface="Archivo" pitchFamily="34" charset="-120"/>
+            </a:endParaRPr>
+          </a:p>
+          <a:p>
+            <a:pPr marL="0" indent="0" algn="l">
+              <a:lnSpc>
+                <a:spcPct val="123158"/>
+              </a:lnSpc>
+              <a:buNone/>
+            </a:pPr>
+            <a:r>
+              <a:rPr lang="en-US" sz="1950" b="1" dirty="0">
+                <a:solidFill>
+                  <a:srgbClr val="201E1D"/>
+                </a:solidFill>
+                <a:latin typeface="Archivo" pitchFamily="34" charset="0"/>
+                <a:cs typeface="Archivo" pitchFamily="34" charset="-120"/>
+              </a:rPr>
+              <a:t>IDEAL MODEL: </a:t>
+            </a:r>
+            <a:r>
+              <a:rPr lang="en-US" sz="1950" dirty="0">
+                <a:solidFill>
+                  <a:srgbClr val="201E1D"/>
+                </a:solidFill>
+                <a:latin typeface="Archivo" pitchFamily="34" charset="0"/>
+                <a:cs typeface="Archivo" pitchFamily="34" charset="-120"/>
+              </a:rPr>
+              <a:t>A strong, reasoning model like Claude Opus </a:t>
+            </a:r>
+          </a:p>
+          <a:p>
+            <a:pPr marL="0" indent="0" algn="l">
+              <a:lnSpc>
+                <a:spcPct val="123158"/>
+              </a:lnSpc>
+              <a:buNone/>
+            </a:pPr>
+            <a:r>
+              <a:rPr lang="en-US" sz="1950" dirty="0">
+                <a:solidFill>
+                  <a:srgbClr val="201E1D"/>
+                </a:solidFill>
+                <a:latin typeface="Archivo" pitchFamily="34" charset="0"/>
+                <a:cs typeface="Archivo" pitchFamily="34" charset="-120"/>
+              </a:rPr>
+              <a:t>Will cost more on each run, but saves time &amp; overall cost by doing critical tasks right the first time and inspecting other agents</a:t>
+            </a:r>
+            <a:r>
+              <a:rPr lang="en-US" sz="1950">
+                <a:solidFill>
+                  <a:srgbClr val="201E1D"/>
+                </a:solidFill>
+                <a:latin typeface="Archivo" pitchFamily="34" charset="0"/>
+                <a:cs typeface="Archivo" pitchFamily="34" charset="-120"/>
+              </a:rPr>
+              <a:t>’ work</a:t>
             </a:r>
             <a:endParaRPr lang="en-US" sz="1950" dirty="0"/>
           </a:p>
